--- a/docs/答辩PPT-恶意攻击行为溯源分析系统.pptx
+++ b/docs/答辩PPT-恶意攻击行为溯源分析系统.pptx
@@ -9607,7 +9607,7 @@
                 </a:solidFill>
                 <a:latin typeface="Microsoft YaHei"/>
               </a:rPr>
-              <a:t>✓ B 31 类型 · C 10 检测器 · D 9 阶段关联</a:t>
+              <a:t>✓ B 33 类型 · C 10 检测器 · D 9 阶段关联</a:t>
             </a:r>
           </a:p>
         </p:txBody>
@@ -9848,7 +9848,7 @@
                 </a:solidFill>
                 <a:latin typeface="Microsoft YaHei"/>
               </a:rPr>
-              <a:t>▸ 主机侧深挖：内存注入 / 反射加载</a:t>
+              <a:t>内存镜像取证：YARA 扫描</a:t>
             </a:r>
           </a:p>
         </p:txBody>
@@ -12355,7 +12355,7 @@
                 </a:solidFill>
                 <a:latin typeface="Microsoft YaHei"/>
               </a:rPr>
-              <a:t>31 种事件类型</a:t>
+              <a:t>33 种事件类型</a:t>
             </a:r>
           </a:p>
         </p:txBody>
@@ -14321,7 +14321,7 @@
                 </a:solidFill>
                 <a:latin typeface="Microsoft YaHei"/>
               </a:rPr>
-              <a:t>主机侧 31 种事件类型 · 网络侧 10 检测器 → ATT&amp;CK</a:t>
+              <a:t>主机侧 33 种事件类型 · 网络侧 10 检测器 → ATT&amp;CK</a:t>
             </a:r>
           </a:p>
         </p:txBody>
@@ -14567,7 +14567,7 @@
                 </a:solidFill>
                 <a:latin typeface="Microsoft YaHei"/>
               </a:rPr>
-              <a:t>✓ 31 种标准事件类型，时间统一 UTC+8</a:t>
+              <a:t>✓ 33 种标准事件类型，时间统一 UTC+8</a:t>
             </a:r>
           </a:p>
         </p:txBody>
@@ -14645,7 +14645,7 @@
                 </a:solidFill>
                 <a:latin typeface="Microsoft YaHei"/>
               </a:rPr>
-              <a:t>✓ 异常预标记 9 规则（爆破/编码执行/持久化…）</a:t>
+              <a:t>✓ 异常预标记 8 规则（爆破/编码执行/内存注入…）</a:t>
             </a:r>
           </a:p>
         </p:txBody>
